--- a/exports/knowledge_flow/mighty_skill_bridge_ceo_presentation_2026-06-02_branded.pptx
+++ b/exports/knowledge_flow/mighty_skill_bridge_ceo_presentation_2026-06-02_branded.pptx
@@ -4985,21 +4985,45 @@
                 </a:solidFill>
                 <a:latin typeface="Consolas"/>
               </a:rPr>
-              <a:t>EVIDENCE</a:t>
-            </a:r>
-          </a:p>
-        </p:txBody>
-      </p:sp>
-      <p:sp>
-        <p:nvSpPr>
-          <p:cNvPr id="16" name="TextBox 15"/>
+              <a:t>LIVE DEMO</a:t>
+            </a:r>
+          </a:p>
+        </p:txBody>
+      </p:sp>
+      <p:pic>
+        <p:nvPicPr>
+          <p:cNvPr id="16" name="Picture 15" descr="public_demo_hero_1920x1080.png"/>
+          <p:cNvPicPr>
+            <a:picLocks noChangeAspect="1"/>
+          </p:cNvPicPr>
+          <p:nvPr/>
+        </p:nvPicPr>
+        <p:blipFill>
+          <a:blip r:embed="rId2"/>
+          <a:stretch>
+            <a:fillRect/>
+          </a:stretch>
+        </p:blipFill>
+        <p:spPr>
+          <a:xfrm>
+            <a:off x="8138159" y="1920240"/>
+            <a:ext cx="3383279" cy="2788920"/>
+          </a:xfrm>
+          <a:prstGeom prst="rect">
+            <a:avLst/>
+          </a:prstGeom>
+        </p:spPr>
+      </p:pic>
+      <p:sp>
+        <p:nvSpPr>
+          <p:cNvPr id="17" name="TextBox 16"/>
           <p:cNvSpPr txBox="1"/>
           <p:nvPr/>
         </p:nvSpPr>
         <p:spPr>
           <a:xfrm>
-            <a:off x="8138160" y="1828800"/>
-            <a:ext cx="3383280" cy="3200400"/>
+            <a:off x="8138159" y="4754880"/>
+            <a:ext cx="3383279" cy="274320"/>
           </a:xfrm>
           <a:prstGeom prst="rect">
             <a:avLst/>
@@ -5007,27 +5031,27 @@
           <a:noFill/>
         </p:spPr>
         <p:txBody>
-          <a:bodyPr wrap="square" lIns="0" rIns="0" tIns="0" bIns="0">
+          <a:bodyPr wrap="square" lIns="0" rIns="0" tIns="0" bIns="0" anchor="t">
             <a:spAutoFit/>
           </a:bodyPr>
           <a:lstStyle/>
           <a:p>
             <a:pPr algn="l"/>
             <a:r>
-              <a:rPr sz="1000">
+              <a:rPr sz="900" b="0">
                 <a:solidFill>
                   <a:srgbClr val="C5CAE0"/>
                 </a:solidFill>
                 <a:latin typeface="Consolas"/>
               </a:rPr>
-              <a:t>公開 URL: https://kanta13jp1.github.io/mighty-link-ai-connect/    Admin: /admin</a:t>
-            </a:r>
-          </a:p>
-        </p:txBody>
-      </p:sp>
-      <p:sp>
-        <p:nvSpPr>
-          <p:cNvPr id="17" name="Rectangle 16"/>
+              <a:t>https://kanta13jp1.github.io/mighty-link-ai-connect/</a:t>
+            </a:r>
+          </a:p>
+        </p:txBody>
+      </p:sp>
+      <p:sp>
+        <p:nvSpPr>
+          <p:cNvPr id="18" name="Rectangle 17"/>
           <p:cNvSpPr/>
           <p:nvPr/>
         </p:nvSpPr>
@@ -5073,7 +5097,7 @@
       </p:sp>
       <p:sp>
         <p:nvSpPr>
-          <p:cNvPr id="18" name="TextBox 17"/>
+          <p:cNvPr id="19" name="TextBox 18"/>
           <p:cNvSpPr txBox="1"/>
           <p:nvPr/>
         </p:nvSpPr>
@@ -5108,7 +5132,7 @@
       </p:sp>
       <p:sp>
         <p:nvSpPr>
-          <p:cNvPr id="19" name="TextBox 18"/>
+          <p:cNvPr id="20" name="TextBox 19"/>
           <p:cNvSpPr txBox="1"/>
           <p:nvPr/>
         </p:nvSpPr>
@@ -5143,7 +5167,7 @@
       </p:sp>
       <p:sp>
         <p:nvSpPr>
-          <p:cNvPr id="20" name="TextBox 19"/>
+          <p:cNvPr id="21" name="TextBox 20"/>
           <p:cNvSpPr txBox="1"/>
           <p:nvPr/>
         </p:nvSpPr>
